--- a/mart-cedes-pano.pptx
+++ b/mart-cedes-pano.pptx
@@ -1252,6 +1252,10 @@
           </a:solidFill>
           <a:ln/>
         </p:spPr>
+        <p:txBody>
+          <a:bodyPr/>
+          <a:p/>
+        </p:txBody>
       </p:sp>
       <p:sp>
         <p:nvSpPr>
@@ -1274,6 +1278,10 @@
           </a:solidFill>
           <a:ln/>
         </p:spPr>
+        <p:txBody>
+          <a:bodyPr/>
+          <a:p/>
+        </p:txBody>
       </p:sp>
       <p:sp>
         <p:nvSpPr>
@@ -1347,7 +1355,7 @@
                 <a:ea typeface="Calibri" pitchFamily="34" charset="-122"/>
                 <a:cs typeface="Calibri" pitchFamily="34" charset="-120"/>
               </a:rPr>
-              <a:t>MART AYI  •  VATANSEVERLİK • YARDIMSEVERLİK • ÇALIŞKANLIK</a:t>
+              <a:t>MART AYI  •  SAĞLIKLI YAŞAM • VATANSEVERLİK • DOSTLUK</a:t>
             </a:r>
             <a:endParaRPr lang="en-US" sz="2000" dirty="0"/>
           </a:p>
@@ -1383,7 +1391,7 @@
                   <a:srgbClr val="FFFFFF"/>
                 </a:solidFill>
               </a:rPr>
-              <a:t>2025 - 2026 Eğitim Öğretim Yılı</a:t>
+              <a:t>2026 - 2027 Eğitim Öğretim Yılı</a:t>
             </a:r>
             <a:endParaRPr lang="en-US" sz="1600" dirty="0"/>
           </a:p>
@@ -1398,6 +1406,384 @@
 </file>
 
 <file path=ppt/slides/slide2.xml><?xml version="1.0" encoding="utf-8"?>
+<p:sld xmlns:a="http://schemas.openxmlformats.org/drawingml/2006/main" xmlns:r="http://schemas.openxmlformats.org/officeDocument/2006/relationships" xmlns:p="http://schemas.openxmlformats.org/presentationml/2006/main">
+  <p:cSld name="Slide 4">
+    <p:bg>
+      <p:bgPr>
+        <a:solidFill>
+          <a:srgbClr val="FFFFFF"/>
+        </a:solidFill>
+      </p:bgPr>
+    </p:bg>
+    <p:spTree>
+      <p:nvGrpSpPr>
+        <p:cNvPr id="1" name=""/>
+        <p:cNvGrpSpPr/>
+        <p:nvPr/>
+      </p:nvGrpSpPr>
+      <p:grpSpPr>
+        <a:xfrm>
+          <a:off x="0" y="0"/>
+          <a:ext cx="0" cy="0"/>
+          <a:chOff x="0" y="0"/>
+          <a:chExt cx="0" cy="0"/>
+        </a:xfrm>
+      </p:grpSpPr>
+      <p:sp>
+        <p:nvSpPr>
+          <p:cNvPr id="2" name="Shape 0"/>
+          <p:cNvSpPr/>
+          <p:nvPr/>
+        </p:nvSpPr>
+        <p:spPr>
+          <a:xfrm>
+            <a:off x="0" y="0"/>
+            <a:ext cx="3840480" cy="6858000"/>
+          </a:xfrm>
+          <a:prstGeom prst="rect">
+            <a:avLst/>
+          </a:prstGeom>
+          <a:solidFill>
+            <a:srgbClr val="6D2E46"/>
+          </a:solidFill>
+          <a:ln/>
+        </p:spPr>
+        <p:txBody>
+          <a:bodyPr/>
+          <a:p/>
+        </p:txBody>
+      </p:sp>
+      <p:sp>
+        <p:nvSpPr>
+          <p:cNvPr id="3" name="Text 1"/>
+          <p:cNvSpPr/>
+          <p:nvPr/>
+        </p:nvSpPr>
+        <p:spPr>
+          <a:xfrm>
+            <a:off x="274320" y="457200"/>
+            <a:ext cx="3291840" cy="1645920"/>
+          </a:xfrm>
+          <a:prstGeom prst="rect">
+            <a:avLst/>
+          </a:prstGeom>
+          <a:noFill/>
+          <a:ln/>
+        </p:spPr>
+        <p:txBody>
+          <a:bodyPr wrap="square" rtlCol="0" anchor="ctr"/>
+          <a:lstStyle/>
+          <a:p>
+            <a:pPr algn="ctr" indent="0" marL="0">
+              <a:buNone/>
+            </a:pPr>
+            <a:r>
+              <a:rPr lang="en-US" sz="8000" dirty="0">
+                <a:solidFill>
+                  <a:srgbClr val="000000"/>
+                </a:solidFill>
+              </a:rPr>
+              <a:t>🍎</a:t>
+            </a:r>
+            <a:endParaRPr lang="en-US" sz="8000" dirty="0"/>
+          </a:p>
+        </p:txBody>
+      </p:sp>
+      <p:sp>
+        <p:nvSpPr>
+          <p:cNvPr id="4" name="Text 2"/>
+          <p:cNvSpPr/>
+          <p:nvPr/>
+        </p:nvSpPr>
+        <p:spPr>
+          <a:xfrm>
+            <a:off x="274320" y="2194560"/>
+            <a:ext cx="3291840" cy="914400"/>
+          </a:xfrm>
+          <a:prstGeom prst="rect">
+            <a:avLst/>
+          </a:prstGeom>
+          <a:noFill/>
+          <a:ln/>
+        </p:spPr>
+        <p:txBody>
+          <a:bodyPr wrap="square" rtlCol="0" anchor="ctr"/>
+          <a:lstStyle/>
+          <a:p>
+            <a:pPr algn="ctr" indent="0" marL="0">
+              <a:buNone/>
+            </a:pPr>
+            <a:r>
+              <a:rPr lang="en-US" sz="2600" b="1" dirty="0">
+                <a:solidFill>
+                  <a:srgbClr val="FFFFFF"/>
+                </a:solidFill>
+                <a:latin typeface="Cambria" pitchFamily="34" charset="0"/>
+                <a:ea typeface="Cambria" pitchFamily="34" charset="-122"/>
+                <a:cs typeface="Cambria" pitchFamily="34" charset="-120"/>
+              </a:rPr>
+              <a:t>SAĞLIKLI YAŞAM</a:t>
+            </a:r>
+            <a:endParaRPr lang="en-US" sz="2600" dirty="0"/>
+          </a:p>
+        </p:txBody>
+      </p:sp>
+      <p:sp>
+        <p:nvSpPr>
+          <p:cNvPr id="5" name="Text 3"/>
+          <p:cNvSpPr/>
+          <p:nvPr/>
+        </p:nvSpPr>
+        <p:spPr>
+          <a:xfrm>
+            <a:off x="274320" y="3017520"/>
+            <a:ext cx="3291840" cy="1280160"/>
+          </a:xfrm>
+          <a:prstGeom prst="rect">
+            <a:avLst/>
+          </a:prstGeom>
+          <a:noFill/>
+          <a:ln/>
+        </p:spPr>
+        <p:txBody>
+          <a:bodyPr wrap="square" rtlCol="0" anchor="ctr"/>
+          <a:lstStyle/>
+          <a:p>
+            <a:pPr algn="ctr" indent="0" marL="0">
+              <a:buNone/>
+            </a:pPr>
+            <a:r>
+              <a:rPr lang="en-US" sz="1500" i="1" dirty="0">
+                <a:solidFill>
+                  <a:srgbClr val="FFFFFF"/>
+                </a:solidFill>
+              </a:rPr>
+              <a:t>Beslenme, Hareket ve Uyku</a:t>
+            </a:r>
+            <a:endParaRPr lang="en-US" sz="1500" dirty="0"/>
+          </a:p>
+        </p:txBody>
+      </p:sp>
+      <p:sp>
+        <p:nvSpPr>
+          <p:cNvPr id="6" name="Shape 4"/>
+          <p:cNvSpPr/>
+          <p:nvPr/>
+        </p:nvSpPr>
+        <p:spPr>
+          <a:xfrm>
+            <a:off x="548640" y="4846320"/>
+            <a:ext cx="2743200" cy="1280160"/>
+          </a:xfrm>
+          <a:prstGeom prst="roundRect">
+            <a:avLst>
+              <a:gd name="adj" fmla="val 7143"/>
+            </a:avLst>
+          </a:prstGeom>
+          <a:solidFill>
+            <a:srgbClr val="FFFFFF">
+              <a:alpha val="85000"/>
+            </a:srgbClr>
+          </a:solidFill>
+          <a:ln/>
+        </p:spPr>
+        <p:txBody>
+          <a:bodyPr/>
+          <a:p/>
+        </p:txBody>
+      </p:sp>
+      <p:sp>
+        <p:nvSpPr>
+          <p:cNvPr id="7" name="Text 5"/>
+          <p:cNvSpPr/>
+          <p:nvPr/>
+        </p:nvSpPr>
+        <p:spPr>
+          <a:xfrm>
+            <a:off x="548640" y="4846320"/>
+            <a:ext cx="2743200" cy="1280160"/>
+          </a:xfrm>
+          <a:prstGeom prst="rect">
+            <a:avLst/>
+          </a:prstGeom>
+          <a:noFill/>
+          <a:ln/>
+        </p:spPr>
+        <p:txBody>
+          <a:bodyPr wrap="square" rtlCol="0" anchor="ctr"/>
+          <a:lstStyle/>
+          <a:p>
+            <a:pPr algn="ctr" indent="0" marL="0">
+              <a:buNone/>
+            </a:pPr>
+            <a:r>
+              <a:rPr lang="en-US" sz="1600" b="1" dirty="0">
+                <a:solidFill>
+                  <a:srgbClr val="2B2B2B"/>
+                </a:solidFill>
+              </a:rPr>
+              <a:t>20. HAFTA</a:t>
+            </a:r>
+            <a:endParaRPr lang="en-US" sz="1600" dirty="0"/>
+          </a:p>
+          <a:p>
+            <a:pPr algn="ctr" indent="0" marL="0">
+              <a:buNone/>
+            </a:pPr>
+            <a:r>
+              <a:rPr lang="en-US" sz="1600" b="1" dirty="0">
+                <a:solidFill>
+                  <a:srgbClr val="2B2B2B"/>
+                </a:solidFill>
+              </a:rPr>
+              <a:t>1 – 5 Mart</a:t>
+            </a:r>
+            <a:endParaRPr lang="en-US" sz="1600" dirty="0"/>
+          </a:p>
+        </p:txBody>
+      </p:sp>
+      <p:sp>
+        <p:nvSpPr>
+          <p:cNvPr id="8" name="Text 6"/>
+          <p:cNvSpPr/>
+          <p:nvPr/>
+        </p:nvSpPr>
+        <p:spPr>
+          <a:xfrm>
+            <a:off x="4206240" y="457200"/>
+            <a:ext cx="7498080" cy="1188720"/>
+          </a:xfrm>
+          <a:prstGeom prst="rect">
+            <a:avLst/>
+          </a:prstGeom>
+          <a:noFill/>
+          <a:ln/>
+        </p:spPr>
+        <p:txBody>
+          <a:bodyPr wrap="square" rtlCol="0" anchor="ctr"/>
+          <a:lstStyle/>
+          <a:p>
+            <a:pPr indent="0" marL="0">
+              <a:buNone/>
+            </a:pPr>
+            <a:r>
+              <a:rPr lang="en-US" sz="2200" b="1" i="1" dirty="0">
+                <a:solidFill>
+                  <a:srgbClr val="36454F"/>
+                </a:solidFill>
+                <a:latin typeface="Cambria" pitchFamily="34" charset="0"/>
+                <a:ea typeface="Cambria" pitchFamily="34" charset="-122"/>
+                <a:cs typeface="Cambria" pitchFamily="34" charset="-120"/>
+              </a:rPr>
+              <a:t>"Sağlıklı yaşam, güçlü ve mutlu olmanın anahtarıdır."</a:t>
+            </a:r>
+            <a:endParaRPr lang="en-US" sz="2200" dirty="0"/>
+          </a:p>
+        </p:txBody>
+      </p:sp>
+      <p:sp>
+        <p:nvSpPr>
+          <p:cNvPr id="9" name="Text 7"/>
+          <p:cNvSpPr/>
+          <p:nvPr/>
+        </p:nvSpPr>
+        <p:spPr>
+          <a:xfrm>
+            <a:off x="4206240" y="1828800"/>
+            <a:ext cx="7498080" cy="4389120"/>
+          </a:xfrm>
+          <a:prstGeom prst="rect">
+            <a:avLst/>
+          </a:prstGeom>
+          <a:noFill/>
+          <a:ln/>
+        </p:spPr>
+        <p:txBody>
+          <a:bodyPr wrap="square" rtlCol="0" anchor="ctr"/>
+          <a:lstStyle/>
+          <a:p>
+            <a:pPr marL="342900" indent="-342900">
+              <a:spcAft>
+                <a:spcPts val="1200"/>
+              </a:spcAft>
+              <a:buSzPct val="100000"/>
+              <a:buChar char="•"/>
+            </a:pPr>
+            <a:r>
+              <a:rPr lang="en-US" sz="1700" dirty="0">
+                <a:solidFill>
+                  <a:srgbClr val="2B2B2B"/>
+                </a:solidFill>
+              </a:rPr>
+              <a:t>Kahvaltımızı asla atlamayız.</a:t>
+            </a:r>
+            <a:endParaRPr lang="en-US" sz="1700" dirty="0"/>
+          </a:p>
+          <a:p>
+            <a:pPr marL="342900" indent="-342900">
+              <a:spcAft>
+                <a:spcPts val="1200"/>
+              </a:spcAft>
+              <a:buSzPct val="100000"/>
+              <a:buChar char="•"/>
+            </a:pPr>
+            <a:r>
+              <a:rPr lang="en-US" sz="1700" dirty="0">
+                <a:solidFill>
+                  <a:srgbClr val="2B2B2B"/>
+                </a:solidFill>
+              </a:rPr>
+              <a:t>Her gün biraz hareket ederiz.</a:t>
+            </a:r>
+            <a:endParaRPr lang="en-US" sz="1700" dirty="0"/>
+          </a:p>
+          <a:p>
+            <a:pPr marL="342900" indent="-342900">
+              <a:spcAft>
+                <a:spcPts val="1200"/>
+              </a:spcAft>
+              <a:buSzPct val="100000"/>
+              <a:buChar char="•"/>
+            </a:pPr>
+            <a:r>
+              <a:rPr lang="en-US" sz="1700" dirty="0">
+                <a:solidFill>
+                  <a:srgbClr val="2B2B2B"/>
+                </a:solidFill>
+              </a:rPr>
+              <a:t>Yeterince ve düzenli uyuruz.</a:t>
+            </a:r>
+            <a:endParaRPr lang="en-US" sz="1700" dirty="0"/>
+          </a:p>
+          <a:p>
+            <a:pPr marL="342900" indent="-342900">
+              <a:spcAft>
+                <a:spcPts val="1200"/>
+              </a:spcAft>
+              <a:buSzPct val="100000"/>
+              <a:buChar char="•"/>
+            </a:pPr>
+            <a:r>
+              <a:rPr lang="en-US" sz="1700" dirty="0">
+                <a:solidFill>
+                  <a:srgbClr val="2B2B2B"/>
+                </a:solidFill>
+              </a:rPr>
+              <a:t>Suyu unutmadan içeriz.</a:t>
+            </a:r>
+            <a:endParaRPr lang="en-US" sz="1700" dirty="0"/>
+          </a:p>
+        </p:txBody>
+      </p:sp>
+    </p:spTree>
+  </p:cSld>
+  <p:clrMapOvr>
+    <a:masterClrMapping/>
+  </p:clrMapOvr>
+</p:sld>
+</file>
+
+<file path=ppt/slides/slide3.xml><?xml version="1.0" encoding="utf-8"?>
 <p:sld xmlns:a="http://schemas.openxmlformats.org/drawingml/2006/main" xmlns:r="http://schemas.openxmlformats.org/officeDocument/2006/relationships" xmlns:p="http://schemas.openxmlformats.org/presentationml/2006/main">
   <p:cSld name="Slide 2">
     <p:bg>
@@ -1440,6 +1826,10 @@
           </a:solidFill>
           <a:ln/>
         </p:spPr>
+        <p:txBody>
+          <a:bodyPr/>
+          <a:p/>
+        </p:txBody>
       </p:sp>
       <p:sp>
         <p:nvSpPr>
@@ -1575,6 +1965,10 @@
           </a:solidFill>
           <a:ln/>
         </p:spPr>
+        <p:txBody>
+          <a:bodyPr/>
+          <a:p/>
+        </p:txBody>
       </p:sp>
       <p:sp>
         <p:nvSpPr>
@@ -1606,7 +2000,7 @@
                   <a:srgbClr val="2B2B2B"/>
                 </a:solidFill>
               </a:rPr>
-              <a:t>1. HAFTA</a:t>
+              <a:t>21 ve 22. HAFTA</a:t>
             </a:r>
             <a:endParaRPr lang="en-US" sz="1600" dirty="0"/>
           </a:p>
@@ -1620,7 +2014,7 @@
                   <a:srgbClr val="2B2B2B"/>
                 </a:solidFill>
               </a:rPr>
-              <a:t>02 - 06 Mart</a:t>
+              <a:t>15 – 26 Mart</a:t>
             </a:r>
             <a:endParaRPr lang="en-US" sz="1600" dirty="0"/>
           </a:p>
@@ -1767,7 +2161,7 @@
 </p:sld>
 </file>
 
-<file path=ppt/slides/slide3.xml><?xml version="1.0" encoding="utf-8"?>
+<file path=ppt/slides/slide4.xml><?xml version="1.0" encoding="utf-8"?>
 <p:sld xmlns:a="http://schemas.openxmlformats.org/drawingml/2006/main" xmlns:r="http://schemas.openxmlformats.org/officeDocument/2006/relationships" xmlns:p="http://schemas.openxmlformats.org/presentationml/2006/main">
   <p:cSld name="Slide 3">
     <p:bg>
@@ -1806,10 +2200,14 @@
             <a:avLst/>
           </a:prstGeom>
           <a:solidFill>
-            <a:srgbClr val="2C5F2D"/>
+            <a:srgbClr val="990011"/>
           </a:solidFill>
           <a:ln/>
         </p:spPr>
+        <p:txBody>
+          <a:bodyPr/>
+          <a:p/>
+        </p:txBody>
       </p:sp>
       <p:sp>
         <p:nvSpPr>
@@ -1841,7 +2239,7 @@
                   <a:srgbClr val="000000"/>
                 </a:solidFill>
               </a:rPr>
-              <a:t>🤲</a:t>
+              <a:t>🤝</a:t>
             </a:r>
             <a:endParaRPr lang="en-US" sz="8000" dirty="0"/>
           </a:p>
@@ -1880,7 +2278,7 @@
                 <a:ea typeface="Cambria" pitchFamily="34" charset="-122"/>
                 <a:cs typeface="Cambria" pitchFamily="34" charset="-120"/>
               </a:rPr>
-              <a:t>YARDIMSEVERLİK</a:t>
+              <a:t>DOSTLUK</a:t>
             </a:r>
             <a:endParaRPr lang="en-US" sz="2600" dirty="0"/>
           </a:p>
@@ -1916,7 +2314,7 @@
                   <a:srgbClr val="FFFFFF"/>
                 </a:solidFill>
               </a:rPr>
-              <a:t>Elimizi Uzatmak</a:t>
+              <a:t>Gerçek Bir Arkadaş Olmak</a:t>
             </a:r>
             <a:endParaRPr lang="en-US" sz="1500" dirty="0"/>
           </a:p>
@@ -1945,6 +2343,10 @@
           </a:solidFill>
           <a:ln/>
         </p:spPr>
+        <p:txBody>
+          <a:bodyPr/>
+          <a:p/>
+        </p:txBody>
       </p:sp>
       <p:sp>
         <p:nvSpPr>
@@ -1976,7 +2378,7 @@
                   <a:srgbClr val="2B2B2B"/>
                 </a:solidFill>
               </a:rPr>
-              <a:t>2. HAFTA</a:t>
+              <a:t>23. HAFTA</a:t>
             </a:r>
             <a:endParaRPr lang="en-US" sz="1600" dirty="0"/>
           </a:p>
@@ -1990,7 +2392,7 @@
                   <a:srgbClr val="2B2B2B"/>
                 </a:solidFill>
               </a:rPr>
-              <a:t>09 - 13 Mart</a:t>
+              <a:t>29 Mart – 2 Nisan</a:t>
             </a:r>
             <a:endParaRPr lang="en-US" sz="1600" dirty="0"/>
           </a:p>
@@ -2023,13 +2425,13 @@
             <a:r>
               <a:rPr lang="en-US" sz="2200" b="1" i="1" dirty="0">
                 <a:solidFill>
-                  <a:srgbClr val="1E2761"/>
+                  <a:srgbClr val="2F3C7E"/>
                 </a:solidFill>
                 <a:latin typeface="Cambria" pitchFamily="34" charset="0"/>
                 <a:ea typeface="Cambria" pitchFamily="34" charset="-122"/>
                 <a:cs typeface="Cambria" pitchFamily="34" charset="-120"/>
               </a:rPr>
-              <a:t>"Yardımseverlik, karşılık beklemeden elini uzatmaktır."</a:t>
+              <a:t>"Dostluk, zor anda yanında olmaktır."</a:t>
             </a:r>
             <a:endParaRPr lang="en-US" sz="2200" dirty="0"/>
           </a:p>
@@ -2069,7 +2471,7 @@
                   <a:srgbClr val="2B2B2B"/>
                 </a:solidFill>
               </a:rPr>
-              <a:t>İhtiyacı olana elimizden geldiğince yardım ederiz.</a:t>
+              <a:t>Arkadaşımızın yanında zor günde de oluruz.</a:t>
             </a:r>
             <a:endParaRPr lang="en-US" sz="1700" dirty="0"/>
           </a:p>
@@ -2087,7 +2489,7 @@
                   <a:srgbClr val="2B2B2B"/>
                 </a:solidFill>
               </a:rPr>
-              <a:t>Küçük bir yardım bile büyük mutluluk verir.</a:t>
+              <a:t>Alay etmeyiz, destek oluruz.</a:t>
             </a:r>
             <a:endParaRPr lang="en-US" sz="1700" dirty="0"/>
           </a:p>
@@ -2105,7 +2507,7 @@
                   <a:srgbClr val="2B2B2B"/>
                 </a:solidFill>
               </a:rPr>
-              <a:t>Yardım ederken karşılık beklemeyiz.</a:t>
+              <a:t>Paylaşmak dostluğu güçlendirir.</a:t>
             </a:r>
             <a:endParaRPr lang="en-US" sz="1700" dirty="0"/>
           </a:p>
@@ -2123,377 +2525,7 @@
                   <a:srgbClr val="2B2B2B"/>
                 </a:solidFill>
               </a:rPr>
-              <a:t>Birlikte olmak zorlukları kolaylaştırır.</a:t>
-            </a:r>
-            <a:endParaRPr lang="en-US" sz="1700" dirty="0"/>
-          </a:p>
-        </p:txBody>
-      </p:sp>
-    </p:spTree>
-  </p:cSld>
-  <p:clrMapOvr>
-    <a:masterClrMapping/>
-  </p:clrMapOvr>
-</p:sld>
-</file>
-
-<file path=ppt/slides/slide4.xml><?xml version="1.0" encoding="utf-8"?>
-<p:sld xmlns:a="http://schemas.openxmlformats.org/drawingml/2006/main" xmlns:r="http://schemas.openxmlformats.org/officeDocument/2006/relationships" xmlns:p="http://schemas.openxmlformats.org/presentationml/2006/main">
-  <p:cSld name="Slide 4">
-    <p:bg>
-      <p:bgPr>
-        <a:solidFill>
-          <a:srgbClr val="FFFFFF"/>
-        </a:solidFill>
-      </p:bgPr>
-    </p:bg>
-    <p:spTree>
-      <p:nvGrpSpPr>
-        <p:cNvPr id="1" name=""/>
-        <p:cNvGrpSpPr/>
-        <p:nvPr/>
-      </p:nvGrpSpPr>
-      <p:grpSpPr>
-        <a:xfrm>
-          <a:off x="0" y="0"/>
-          <a:ext cx="0" cy="0"/>
-          <a:chOff x="0" y="0"/>
-          <a:chExt cx="0" cy="0"/>
-        </a:xfrm>
-      </p:grpSpPr>
-      <p:sp>
-        <p:nvSpPr>
-          <p:cNvPr id="2" name="Shape 0"/>
-          <p:cNvSpPr/>
-          <p:nvPr/>
-        </p:nvSpPr>
-        <p:spPr>
-          <a:xfrm>
-            <a:off x="0" y="0"/>
-            <a:ext cx="3840480" cy="6858000"/>
-          </a:xfrm>
-          <a:prstGeom prst="rect">
-            <a:avLst/>
-          </a:prstGeom>
-          <a:solidFill>
-            <a:srgbClr val="2C5F2D"/>
-          </a:solidFill>
-          <a:ln/>
-        </p:spPr>
-      </p:sp>
-      <p:sp>
-        <p:nvSpPr>
-          <p:cNvPr id="3" name="Text 1"/>
-          <p:cNvSpPr/>
-          <p:nvPr/>
-        </p:nvSpPr>
-        <p:spPr>
-          <a:xfrm>
-            <a:off x="274320" y="457200"/>
-            <a:ext cx="3291840" cy="1645920"/>
-          </a:xfrm>
-          <a:prstGeom prst="rect">
-            <a:avLst/>
-          </a:prstGeom>
-          <a:noFill/>
-          <a:ln/>
-        </p:spPr>
-        <p:txBody>
-          <a:bodyPr wrap="square" rtlCol="0" anchor="ctr"/>
-          <a:lstStyle/>
-          <a:p>
-            <a:pPr algn="ctr" indent="0" marL="0">
-              <a:buNone/>
-            </a:pPr>
-            <a:r>
-              <a:rPr lang="en-US" sz="8000" dirty="0">
-                <a:solidFill>
-                  <a:srgbClr val="000000"/>
-                </a:solidFill>
-              </a:rPr>
-              <a:t>🐜</a:t>
-            </a:r>
-            <a:endParaRPr lang="en-US" sz="8000" dirty="0"/>
-          </a:p>
-        </p:txBody>
-      </p:sp>
-      <p:sp>
-        <p:nvSpPr>
-          <p:cNvPr id="4" name="Text 2"/>
-          <p:cNvSpPr/>
-          <p:nvPr/>
-        </p:nvSpPr>
-        <p:spPr>
-          <a:xfrm>
-            <a:off x="274320" y="2194560"/>
-            <a:ext cx="3291840" cy="914400"/>
-          </a:xfrm>
-          <a:prstGeom prst="rect">
-            <a:avLst/>
-          </a:prstGeom>
-          <a:noFill/>
-          <a:ln/>
-        </p:spPr>
-        <p:txBody>
-          <a:bodyPr wrap="square" rtlCol="0" anchor="ctr"/>
-          <a:lstStyle/>
-          <a:p>
-            <a:pPr algn="ctr" indent="0" marL="0">
-              <a:buNone/>
-            </a:pPr>
-            <a:r>
-              <a:rPr lang="en-US" sz="2600" b="1" dirty="0">
-                <a:solidFill>
-                  <a:srgbClr val="FFFFFF"/>
-                </a:solidFill>
-                <a:latin typeface="Cambria" pitchFamily="34" charset="0"/>
-                <a:ea typeface="Cambria" pitchFamily="34" charset="-122"/>
-                <a:cs typeface="Cambria" pitchFamily="34" charset="-120"/>
-              </a:rPr>
-              <a:t>ÇALIŞKANLIK</a:t>
-            </a:r>
-            <a:endParaRPr lang="en-US" sz="2600" dirty="0"/>
-          </a:p>
-        </p:txBody>
-      </p:sp>
-      <p:sp>
-        <p:nvSpPr>
-          <p:cNvPr id="5" name="Text 3"/>
-          <p:cNvSpPr/>
-          <p:nvPr/>
-        </p:nvSpPr>
-        <p:spPr>
-          <a:xfrm>
-            <a:off x="274320" y="3017520"/>
-            <a:ext cx="3291840" cy="1280160"/>
-          </a:xfrm>
-          <a:prstGeom prst="rect">
-            <a:avLst/>
-          </a:prstGeom>
-          <a:noFill/>
-          <a:ln/>
-        </p:spPr>
-        <p:txBody>
-          <a:bodyPr wrap="square" rtlCol="0" anchor="ctr"/>
-          <a:lstStyle/>
-          <a:p>
-            <a:pPr algn="ctr" indent="0" marL="0">
-              <a:buNone/>
-            </a:pPr>
-            <a:r>
-              <a:rPr lang="en-US" sz="1500" i="1" dirty="0">
-                <a:solidFill>
-                  <a:srgbClr val="FFFFFF"/>
-                </a:solidFill>
-              </a:rPr>
-              <a:t>Emek ve Gayretin Değeri</a:t>
-            </a:r>
-            <a:endParaRPr lang="en-US" sz="1500" dirty="0"/>
-          </a:p>
-        </p:txBody>
-      </p:sp>
-      <p:sp>
-        <p:nvSpPr>
-          <p:cNvPr id="6" name="Shape 4"/>
-          <p:cNvSpPr/>
-          <p:nvPr/>
-        </p:nvSpPr>
-        <p:spPr>
-          <a:xfrm>
-            <a:off x="548640" y="4846320"/>
-            <a:ext cx="2743200" cy="1280160"/>
-          </a:xfrm>
-          <a:prstGeom prst="roundRect">
-            <a:avLst>
-              <a:gd name="adj" fmla="val 7143"/>
-            </a:avLst>
-          </a:prstGeom>
-          <a:solidFill>
-            <a:srgbClr val="FFFFFF">
-              <a:alpha val="85000"/>
-            </a:srgbClr>
-          </a:solidFill>
-          <a:ln/>
-        </p:spPr>
-      </p:sp>
-      <p:sp>
-        <p:nvSpPr>
-          <p:cNvPr id="7" name="Text 5"/>
-          <p:cNvSpPr/>
-          <p:nvPr/>
-        </p:nvSpPr>
-        <p:spPr>
-          <a:xfrm>
-            <a:off x="548640" y="4846320"/>
-            <a:ext cx="2743200" cy="1280160"/>
-          </a:xfrm>
-          <a:prstGeom prst="rect">
-            <a:avLst/>
-          </a:prstGeom>
-          <a:noFill/>
-          <a:ln/>
-        </p:spPr>
-        <p:txBody>
-          <a:bodyPr wrap="square" rtlCol="0" anchor="ctr"/>
-          <a:lstStyle/>
-          <a:p>
-            <a:pPr algn="ctr" indent="0" marL="0">
-              <a:buNone/>
-            </a:pPr>
-            <a:r>
-              <a:rPr lang="en-US" sz="1600" b="1" dirty="0">
-                <a:solidFill>
-                  <a:srgbClr val="2B2B2B"/>
-                </a:solidFill>
-              </a:rPr>
-              <a:t>3. HAFTA</a:t>
-            </a:r>
-            <a:endParaRPr lang="en-US" sz="1600" dirty="0"/>
-          </a:p>
-          <a:p>
-            <a:pPr algn="ctr" indent="0" marL="0">
-              <a:buNone/>
-            </a:pPr>
-            <a:r>
-              <a:rPr lang="en-US" sz="1600" b="1" dirty="0">
-                <a:solidFill>
-                  <a:srgbClr val="2B2B2B"/>
-                </a:solidFill>
-              </a:rPr>
-              <a:t>16 - 20 Mart</a:t>
-            </a:r>
-            <a:endParaRPr lang="en-US" sz="1600" dirty="0"/>
-          </a:p>
-        </p:txBody>
-      </p:sp>
-      <p:sp>
-        <p:nvSpPr>
-          <p:cNvPr id="8" name="Text 6"/>
-          <p:cNvSpPr/>
-          <p:nvPr/>
-        </p:nvSpPr>
-        <p:spPr>
-          <a:xfrm>
-            <a:off x="4206240" y="457200"/>
-            <a:ext cx="7498080" cy="1188720"/>
-          </a:xfrm>
-          <a:prstGeom prst="rect">
-            <a:avLst/>
-          </a:prstGeom>
-          <a:noFill/>
-          <a:ln/>
-        </p:spPr>
-        <p:txBody>
-          <a:bodyPr wrap="square" rtlCol="0" anchor="ctr"/>
-          <a:lstStyle/>
-          <a:p>
-            <a:pPr indent="0" marL="0">
-              <a:buNone/>
-            </a:pPr>
-            <a:r>
-              <a:rPr lang="en-US" sz="2200" b="1" i="1" dirty="0">
-                <a:solidFill>
-                  <a:srgbClr val="1E2761"/>
-                </a:solidFill>
-                <a:latin typeface="Cambria" pitchFamily="34" charset="0"/>
-                <a:ea typeface="Cambria" pitchFamily="34" charset="-122"/>
-                <a:cs typeface="Cambria" pitchFamily="34" charset="-120"/>
-              </a:rPr>
-              <a:t>"Bugünün emeği, yarının güvencesidir."</a:t>
-            </a:r>
-            <a:endParaRPr lang="en-US" sz="2200" dirty="0"/>
-          </a:p>
-        </p:txBody>
-      </p:sp>
-      <p:sp>
-        <p:nvSpPr>
-          <p:cNvPr id="9" name="Text 7"/>
-          <p:cNvSpPr/>
-          <p:nvPr/>
-        </p:nvSpPr>
-        <p:spPr>
-          <a:xfrm>
-            <a:off x="4206240" y="1828800"/>
-            <a:ext cx="7498080" cy="4389120"/>
-          </a:xfrm>
-          <a:prstGeom prst="rect">
-            <a:avLst/>
-          </a:prstGeom>
-          <a:noFill/>
-          <a:ln/>
-        </p:spPr>
-        <p:txBody>
-          <a:bodyPr wrap="square" rtlCol="0" anchor="ctr"/>
-          <a:lstStyle/>
-          <a:p>
-            <a:pPr marL="342900" indent="-342900">
-              <a:spcAft>
-                <a:spcPts val="1200"/>
-              </a:spcAft>
-              <a:buSzPct val="100000"/>
-              <a:buChar char="•"/>
-            </a:pPr>
-            <a:r>
-              <a:rPr lang="en-US" sz="1700" dirty="0">
-                <a:solidFill>
-                  <a:srgbClr val="2B2B2B"/>
-                </a:solidFill>
-              </a:rPr>
-              <a:t>Görevlerimizi ertelemeden yaparız.</a:t>
-            </a:r>
-            <a:endParaRPr lang="en-US" sz="1700" dirty="0"/>
-          </a:p>
-          <a:p>
-            <a:pPr marL="342900" indent="-342900">
-              <a:spcAft>
-                <a:spcPts val="1200"/>
-              </a:spcAft>
-              <a:buSzPct val="100000"/>
-              <a:buChar char="•"/>
-            </a:pPr>
-            <a:r>
-              <a:rPr lang="en-US" sz="1700" dirty="0">
-                <a:solidFill>
-                  <a:srgbClr val="2B2B2B"/>
-                </a:solidFill>
-              </a:rPr>
-              <a:t>Düzenli çalışmak başarıyı getirir.</a:t>
-            </a:r>
-            <a:endParaRPr lang="en-US" sz="1700" dirty="0"/>
-          </a:p>
-          <a:p>
-            <a:pPr marL="342900" indent="-342900">
-              <a:spcAft>
-                <a:spcPts val="1200"/>
-              </a:spcAft>
-              <a:buSzPct val="100000"/>
-              <a:buChar char="•"/>
-            </a:pPr>
-            <a:r>
-              <a:rPr lang="en-US" sz="1700" dirty="0">
-                <a:solidFill>
-                  <a:srgbClr val="2B2B2B"/>
-                </a:solidFill>
-              </a:rPr>
-              <a:t>Küçük adımlar büyük hedeflere ulaştırır.</a:t>
-            </a:r>
-            <a:endParaRPr lang="en-US" sz="1700" dirty="0"/>
-          </a:p>
-          <a:p>
-            <a:pPr marL="342900" indent="-342900">
-              <a:spcAft>
-                <a:spcPts val="1200"/>
-              </a:spcAft>
-              <a:buSzPct val="100000"/>
-              <a:buChar char="•"/>
-            </a:pPr>
-            <a:r>
-              <a:rPr lang="en-US" sz="1700" dirty="0">
-                <a:solidFill>
-                  <a:srgbClr val="2B2B2B"/>
-                </a:solidFill>
-              </a:rPr>
-              <a:t>Emek vermeden sonuç beklemeyiz.</a:t>
+              <a:t>Gerçek dost, doğruyu da söyleyebilendir.</a:t>
             </a:r>
             <a:endParaRPr lang="en-US" sz="1700" dirty="0"/>
           </a:p>
@@ -2600,7 +2632,7 @@
                   <a:srgbClr val="F9E795"/>
                 </a:solidFill>
               </a:rPr>
-              <a:t>VATANSEVERLİK • YARDIMSEVERLİK • ÇALIŞKANLIK</a:t>
+              <a:t>SAĞLIKLI YAŞAM • VATANSEVERLİK • DOSTLUK</a:t>
             </a:r>
             <a:endParaRPr lang="en-US" sz="2200" dirty="0"/>
           </a:p>
